--- a/src/curriculum/lesson_3.2.pptx
+++ b/src/curriculum/lesson_3.2.pptx
@@ -4239,7 +4239,32 @@
                 <a:cs typeface="Calibri"/>
                 <a:sym typeface="Calibri"/>
               </a:rPr>
-              <a:t> to explore how light waves are impacted by CO₂</a:t>
+              <a:t> (</a:t>
+            </a:r>
+            <a:r>
+              <a:rPr lang="en" sz="1200" u="sng">
+                <a:solidFill>
+                  <a:schemeClr val="hlink"/>
+                </a:solidFill>
+                <a:latin typeface="Calibri"/>
+                <a:ea typeface="Calibri"/>
+                <a:cs typeface="Calibri"/>
+                <a:sym typeface="Calibri"/>
+                <a:hlinkClick r:id="rId3"/>
+              </a:rPr>
+              <a:t>https://phet.colorado.edu/sims/html/greenhouse-effect/latest/greenhouse-effect_all.html</a:t>
+            </a:r>
+            <a:r>
+              <a:rPr lang="en" sz="1200">
+                <a:solidFill>
+                  <a:schemeClr val="dk1"/>
+                </a:solidFill>
+                <a:latin typeface="Calibri"/>
+                <a:ea typeface="Calibri"/>
+                <a:cs typeface="Calibri"/>
+                <a:sym typeface="Calibri"/>
+              </a:rPr>
+              <a:t>) to explore how light waves are impacted by CO₂</a:t>
             </a:r>
             <a:r>
               <a:rPr lang="en" sz="1200" b="1">
@@ -5492,7 +5517,32 @@
                 <a:cs typeface="Calibri"/>
                 <a:sym typeface="Calibri"/>
               </a:rPr>
-              <a:t> [3:08] </a:t>
+              <a:t> (</a:t>
+            </a:r>
+            <a:r>
+              <a:rPr lang="en" sz="1200" b="1" u="sng">
+                <a:solidFill>
+                  <a:schemeClr val="hlink"/>
+                </a:solidFill>
+                <a:latin typeface="Calibri"/>
+                <a:ea typeface="Calibri"/>
+                <a:cs typeface="Calibri"/>
+                <a:sym typeface="Calibri"/>
+                <a:hlinkClick r:id="rId3"/>
+              </a:rPr>
+              <a:t>https://www.youtube.com/watch?v=sTvqIijqvTg</a:t>
+            </a:r>
+            <a:r>
+              <a:rPr lang="en" sz="1200" b="1">
+                <a:solidFill>
+                  <a:schemeClr val="dk1"/>
+                </a:solidFill>
+                <a:latin typeface="Calibri"/>
+                <a:ea typeface="Calibri"/>
+                <a:cs typeface="Calibri"/>
+                <a:sym typeface="Calibri"/>
+              </a:rPr>
+              <a:t>) [3:08] </a:t>
             </a:r>
             <a:r>
               <a:rPr lang="en" sz="1200">
@@ -14384,7 +14434,7 @@
               <a:t>Take a piece of paper and split it into two equal halves or use </a:t>
             </a:r>
             <a:r>
-              <a:rPr lang="en" sz="1500" i="1" dirty="0">
+              <a:rPr lang="en" sz="1500" i="1" u="sng" dirty="0">
                 <a:solidFill>
                   <a:schemeClr val="hlink"/>
                 </a:solidFill>
@@ -15803,7 +15853,7 @@
         <p:spPr>
           <a:xfrm>
             <a:off x="311700" y="1138325"/>
-            <a:ext cx="8520600" cy="572700"/>
+            <a:ext cx="8520600" cy="1089486"/>
           </a:xfrm>
           <a:prstGeom prst="rect">
             <a:avLst/>
@@ -15838,7 +15888,7 @@
               <a:t>In your </a:t>
             </a:r>
             <a:r>
-              <a:rPr lang="en" sz="2000" i="1" dirty="0">
+              <a:rPr lang="en" sz="2000" i="1" u="sng" dirty="0">
                 <a:solidFill>
                   <a:schemeClr val="hlink"/>
                 </a:solidFill>
@@ -17771,7 +17821,7 @@
               <a:t>in the atmosphere. Answer questions in </a:t>
             </a:r>
             <a:r>
-              <a:rPr lang="en" sz="1600" i="1" dirty="0">
+              <a:rPr lang="en" sz="1600" i="1" u="sng" dirty="0">
                 <a:solidFill>
                   <a:schemeClr val="hlink"/>
                 </a:solidFill>
@@ -20220,7 +20270,7 @@
               <a:t>In your </a:t>
             </a:r>
             <a:r>
-              <a:rPr lang="en" sz="2000" i="1" dirty="0">
+              <a:rPr lang="en" sz="2000" i="1" u="sng" dirty="0">
                 <a:solidFill>
                   <a:schemeClr val="hlink"/>
                 </a:solidFill>
